--- a/SDLC/Projects/TMP-specimen-sorter-api — Specimen Sorter API/assets/Specimen Sorter API.pptx
+++ b/SDLC/Projects/TMP-specimen-sorter-api — Specimen Sorter API/assets/Specimen Sorter API.pptx
@@ -11780,7 +11780,7 @@
       </p:sp>
       <p:pic>
         <p:nvPicPr>
-          <p:cNvPr id="3" name="Image 0" descr="/Users/dragonchong/Application/Obsidian/HA-Notes/LIS/skills/design-review-pptx/assets/icons/png/onDark/clipboard-check.png">    </p:cNvPr>
+          <p:cNvPr id="3" name="Image 0" descr="D:\Github\HA-Notes\LIS\skills\design-review-pptx\assets\icons\png\onDark\clipboard-check.png">    </p:cNvPr>
           <p:cNvPicPr>
             <a:picLocks noChangeAspect="1"/>
           </p:cNvPicPr>
@@ -12495,7 +12495,7 @@
                       </a:endParaRPr>
                     </a:p>
                   </a:txBody>
-                  <a:tcPr marL="14630400" marR="14630400" marT="0" marB="0" anchor="ctr">
+                  <a:tcPr marL="201168" marR="201168" marT="54864" marB="54864" anchor="ctr">
                     <a:lnL w="0" cap="flat" cmpd="sng" algn="ctr">
                       <a:noFill/>
                     </a:lnL>
@@ -12545,7 +12545,7 @@
                       </a:endParaRPr>
                     </a:p>
                   </a:txBody>
-                  <a:tcPr marL="14630400" marR="14630400" marT="0" marB="0" anchor="ctr">
+                  <a:tcPr marL="201168" marR="201168" marT="54864" marB="54864" anchor="ctr">
                     <a:lnL w="0" cap="flat" cmpd="sng" algn="ctr">
                       <a:noFill/>
                     </a:lnL>
@@ -12595,7 +12595,7 @@
                       </a:endParaRPr>
                     </a:p>
                   </a:txBody>
-                  <a:tcPr marL="14630400" marR="14630400" marT="0" marB="0" anchor="ctr">
+                  <a:tcPr marL="201168" marR="201168" marT="54864" marB="54864" anchor="ctr">
                     <a:lnL w="0" cap="flat" cmpd="sng" algn="ctr">
                       <a:noFill/>
                     </a:lnL>
@@ -12647,7 +12647,7 @@
                       </a:endParaRPr>
                     </a:p>
                   </a:txBody>
-                  <a:tcPr marL="14630400" marR="14630400" marT="0" marB="0" anchor="ctr">
+                  <a:tcPr marL="201168" marR="201168" marT="54864" marB="54864" anchor="ctr">
                     <a:lnL w="0" cap="flat" cmpd="sng" algn="ctr">
                       <a:noFill/>
                     </a:lnL>
@@ -12697,7 +12697,7 @@
                       </a:endParaRPr>
                     </a:p>
                   </a:txBody>
-                  <a:tcPr marL="14630400" marR="14630400" marT="0" marB="0" anchor="ctr">
+                  <a:tcPr marL="201168" marR="201168" marT="54864" marB="54864" anchor="ctr">
                     <a:lnL w="0" cap="flat" cmpd="sng" algn="ctr">
                       <a:noFill/>
                     </a:lnL>
@@ -12747,7 +12747,7 @@
                       </a:endParaRPr>
                     </a:p>
                   </a:txBody>
-                  <a:tcPr marL="14630400" marR="14630400" marT="0" marB="0" anchor="ctr">
+                  <a:tcPr marL="201168" marR="201168" marT="54864" marB="54864" anchor="ctr">
                     <a:lnL w="0" cap="flat" cmpd="sng" algn="ctr">
                       <a:noFill/>
                     </a:lnL>
@@ -12799,7 +12799,7 @@
                       </a:endParaRPr>
                     </a:p>
                   </a:txBody>
-                  <a:tcPr marL="14630400" marR="14630400" marT="0" marB="0" anchor="ctr">
+                  <a:tcPr marL="201168" marR="201168" marT="54864" marB="54864" anchor="ctr">
                     <a:lnL w="0" cap="flat" cmpd="sng" algn="ctr">
                       <a:noFill/>
                     </a:lnL>
@@ -12849,7 +12849,7 @@
                       </a:endParaRPr>
                     </a:p>
                   </a:txBody>
-                  <a:tcPr marL="14630400" marR="14630400" marT="0" marB="0" anchor="ctr">
+                  <a:tcPr marL="201168" marR="201168" marT="54864" marB="54864" anchor="ctr">
                     <a:lnL w="0" cap="flat" cmpd="sng" algn="ctr">
                       <a:noFill/>
                     </a:lnL>
@@ -12899,7 +12899,7 @@
                       </a:endParaRPr>
                     </a:p>
                   </a:txBody>
-                  <a:tcPr marL="14630400" marR="14630400" marT="0" marB="0" anchor="ctr">
+                  <a:tcPr marL="201168" marR="201168" marT="54864" marB="54864" anchor="ctr">
                     <a:lnL w="0" cap="flat" cmpd="sng" algn="ctr">
                       <a:noFill/>
                     </a:lnL>
@@ -12951,7 +12951,7 @@
                       </a:endParaRPr>
                     </a:p>
                   </a:txBody>
-                  <a:tcPr marL="14630400" marR="14630400" marT="0" marB="0" anchor="ctr">
+                  <a:tcPr marL="201168" marR="201168" marT="54864" marB="54864" anchor="ctr">
                     <a:lnL w="0" cap="flat" cmpd="sng" algn="ctr">
                       <a:noFill/>
                     </a:lnL>
@@ -13001,7 +13001,7 @@
                       </a:endParaRPr>
                     </a:p>
                   </a:txBody>
-                  <a:tcPr marL="14630400" marR="14630400" marT="0" marB="0" anchor="ctr">
+                  <a:tcPr marL="201168" marR="201168" marT="54864" marB="54864" anchor="ctr">
                     <a:lnL w="0" cap="flat" cmpd="sng" algn="ctr">
                       <a:noFill/>
                     </a:lnL>
@@ -13051,7 +13051,7 @@
                       </a:endParaRPr>
                     </a:p>
                   </a:txBody>
-                  <a:tcPr marL="14630400" marR="14630400" marT="0" marB="0" anchor="ctr">
+                  <a:tcPr marL="201168" marR="201168" marT="54864" marB="54864" anchor="ctr">
                     <a:lnL w="0" cap="flat" cmpd="sng" algn="ctr">
                       <a:noFill/>
                     </a:lnL>
@@ -13103,7 +13103,7 @@
                       </a:endParaRPr>
                     </a:p>
                   </a:txBody>
-                  <a:tcPr marL="14630400" marR="14630400" marT="0" marB="0" anchor="ctr">
+                  <a:tcPr marL="201168" marR="201168" marT="54864" marB="54864" anchor="ctr">
                     <a:lnL w="0" cap="flat" cmpd="sng" algn="ctr">
                       <a:noFill/>
                     </a:lnL>
@@ -13153,7 +13153,7 @@
                       </a:endParaRPr>
                     </a:p>
                   </a:txBody>
-                  <a:tcPr marL="14630400" marR="14630400" marT="0" marB="0" anchor="ctr">
+                  <a:tcPr marL="201168" marR="201168" marT="54864" marB="54864" anchor="ctr">
                     <a:lnL w="0" cap="flat" cmpd="sng" algn="ctr">
                       <a:noFill/>
                     </a:lnL>
@@ -13203,7 +13203,7 @@
                       </a:endParaRPr>
                     </a:p>
                   </a:txBody>
-                  <a:tcPr marL="14630400" marR="14630400" marT="0" marB="0" anchor="ctr">
+                  <a:tcPr marL="201168" marR="201168" marT="54864" marB="54864" anchor="ctr">
                     <a:lnL w="0" cap="flat" cmpd="sng" algn="ctr">
                       <a:noFill/>
                     </a:lnL>
@@ -13255,7 +13255,7 @@
                       </a:endParaRPr>
                     </a:p>
                   </a:txBody>
-                  <a:tcPr marL="14630400" marR="14630400" marT="0" marB="0" anchor="ctr">
+                  <a:tcPr marL="201168" marR="201168" marT="54864" marB="54864" anchor="ctr">
                     <a:lnL w="0" cap="flat" cmpd="sng" algn="ctr">
                       <a:noFill/>
                     </a:lnL>
@@ -13299,7 +13299,7 @@
                       </a:endParaRPr>
                     </a:p>
                   </a:txBody>
-                  <a:tcPr marL="14630400" marR="14630400" marT="0" marB="0" anchor="ctr">
+                  <a:tcPr marL="201168" marR="201168" marT="54864" marB="54864" anchor="ctr">
                     <a:lnL w="0" cap="flat" cmpd="sng" algn="ctr">
                       <a:noFill/>
                     </a:lnL>
@@ -13343,7 +13343,7 @@
                       </a:endParaRPr>
                     </a:p>
                   </a:txBody>
-                  <a:tcPr marL="14630400" marR="14630400" marT="0" marB="0" anchor="ctr">
+                  <a:tcPr marL="201168" marR="201168" marT="54864" marB="54864" anchor="ctr">
                     <a:lnL w="0" cap="flat" cmpd="sng" algn="ctr">
                       <a:noFill/>
                     </a:lnL>
